--- a/decks/englit-romeo/englit-romeo_ch6_fate-and-the-final-tragedy.pptx
+++ b/decks/englit-romeo/englit-romeo_ch6_fate-and-the-final-tragedy.pptx
@@ -125,36 +125,36 @@
   <p:extLst>
     <p:ext uri="{521415D9-36F7-43E2-AB2F-B90AF26B5E84}">
       <p14:sectionLst xmlns:p14="http://schemas.microsoft.com/office/powerpoint/2010/main">
-        <p14:section name="Opening" id="{50ce1756-3a13-77c8-efaa-503686ea949b}">
+        <p14:section name="Opening" id="{43e34320-fce6-afd9-13f5-c4a9c0492df3}">
           <p14:sldIdLst>
             <p14:sldId id="256"/>
           </p14:sldIdLst>
         </p14:section>
-        <p14:section name="Gate" id="{b1d62801-d522-e795-0eed-e14a5074f1fd}">
+        <p14:section name="Gate" id="{54ed1c3f-65c8-093c-1b37-4515ff864477}">
           <p14:sldIdLst>
             <p14:sldId id="257"/>
             <p14:sldId id="258"/>
           </p14:sldIdLst>
         </p14:section>
-        <p14:section name="Pre-teach" id="{6b67a093-53dd-d643-3f70-6ca51eb78c2c}">
+        <p14:section name="Pre-teach" id="{da5e92b5-9f1e-8eae-063c-6755007b0891}">
           <p14:sldIdLst>
             <p14:sldId id="259"/>
           </p14:sldIdLst>
         </p14:section>
-        <p14:section name="Read-along" id="{9c2f0936-6d8c-2b8b-fbcc-e8e3daee3b77}">
+        <p14:section name="Read-along" id="{f3543341-eb2b-2ec5-cf7a-3e043efe0c4c}">
           <p14:sldIdLst>
             <p14:sldId id="260"/>
             <p14:sldId id="261"/>
           </p14:sldIdLst>
         </p14:section>
-        <p14:section name="Teach" id="{47e4143e-4ca2-24ec-55d2-255041c03419}">
+        <p14:section name="Teach" id="{9b603d32-714e-9d8e-0ec3-3cd1ff89fe96}">
           <p14:sldIdLst>
             <p14:sldId id="262"/>
             <p14:sldId id="263"/>
             <p14:sldId id="264"/>
           </p14:sldIdLst>
         </p14:section>
-        <p14:section name="Routes" id="{39bedce3-66a4-84f1-02de-625417831a70}">
+        <p14:section name="Routes" id="{dff1ecbf-f611-a23f-b0f2-d7354a15a2db}">
           <p14:sldIdLst>
             <p14:sldId id="265"/>
             <p14:sldId id="266"/>
@@ -163,12 +163,12 @@
             <p14:sldId id="269"/>
           </p14:sldIdLst>
         </p14:section>
-        <p14:section name="Close" id="{ffb4d2a3-8cbd-1f1a-4dfe-bebd77ab601b}">
+        <p14:section name="Close" id="{c7d13174-f648-7b9e-d487-21c2627a9cfc}">
           <p14:sldIdLst>
             <p14:sldId id="270"/>
           </p14:sldIdLst>
         </p14:section>
-        <p14:section name="Answers" id="{8db17ee0-587a-15de-be65-1b34a6f8d60c}">
+        <p14:section name="Answers" id="{fd2feade-54c0-1918-3ef2-b298818c218d}">
           <p14:sldIdLst>
             <p14:sldId id="271"/>
             <p14:sldId id="272"/>
@@ -1143,7 +1143,7 @@
               <a:rPr lang="en-US" dirty="0"/>
               <a:t>Exit ticket — individual, silent, on a slip or mini-whiteboard. Recall before help: no notes, no lanes, no hints. Collect before pupils leave.
 Question: Which of these best describes Romeo's hamartia, the flaw that brings about his fall?
-Answer: B   Uncontrolled passion: he loves, fights and despairs too fast to think. Romeo's flaw is passion that outruns thought. He loves Juliet in one night, marries her the next day, kills Tybalt in a moment of fury, and dies without waiting to learn the truth. Every step of the tragedy is a choice made too fast, which is what makes him a tragic hero rather than a victim.
+Answer: A   Uncontrolled passion: he loves, fights and despairs too fast to think. Romeo's flaw is passion that outruns thought. He loves Juliet in one night, marries her the next day, kills Tybalt in a moment of fury, and dies without waiting to learn the truth. Every step of the tragedy is a choice made too fast, which is what makes him a tragic hero rather than a victim.
 Source of this question: module 3 task ("Romeo's hamartia") from the manifest.
 Sort the slips: correct → ready to move on; incorrect → start next lesson in the pre-teach group, with the read-along and the Support lane. Same destination next time.</a:t>
             </a:r>
@@ -1511,7 +1511,7 @@
             <a:r>
               <a:rPr lang="en-US" dirty="0"/>
               <a:t>Answers — exit ticket: Exit ticket. Reveal the answer; pupils mark their own work in a different colour, then read the "why" together. Same destination for every lane, so one answer serves the whole class.
-Answer: B   Uncontrolled passion: he loves, fights and despairs too fast to think
+Answer: A   Uncontrolled passion: he loves, fights and despairs too fast to think
 Why: Romeo's flaw is passion that outruns thought. He loves Juliet in one night, marries her the next day, kills Tybalt in a moment of fury, and dies without waiting to learn the truth. Every step of the tragedy is a choice made too fast, which is what makes him a tragic hero rather than a victim.
 Ask a Support pupil to explain one step, and a Stretch pupil to share their extension.</a:t>
             </a:r>
@@ -1602,7 +1602,7 @@
             <a:r>
               <a:rPr lang="en-US" dirty="0"/>
               <a:t>Do now — retrieval. Silent, no notes, no help: recall comes before any support. Give about four minutes.
-1. Why does the Friar's letter never reach Romeo in Mantua?  →  B   Friar John is shut up in a house suspected of plague
+1. Why does the Friar's letter never reach Romeo in Mantua?  →  C   Friar John is shut up in a house suspected of plague
 2. A tragic hero's fatal flaw is called their ___.  →  hamartia
 3. How does Juliet die at the end of the play?  →  B   She stabs herself with Romeo's dagger
 Circulate: who gets 3/3 (Stretch route), 2/3 (Core), 0–1 (Support)? Use this to route pupils later in the lesson.</a:t>
@@ -1694,7 +1694,7 @@
             <a:r>
               <a:rPr lang="en-US" dirty="0"/>
               <a:t>Answers — pupils mark their own in a different colour, then hands up for 3/3, 2/3, 1/3.
-1. B   Friar John is shut up in a house suspected of plague. Friar John could not leave Verona because the house he visited was sealed for plague, so the letter stayed with him. Act 5 Scene 2 explains this.
+1. C   Friar John is shut up in a house suspected of plague. Friar John could not leave Verona because the house he visited was sealed for plague, so the letter stayed with him. Act 5 Scene 2 explains this.
 2. hamartia. Hamartia is the flaw that brings a tragic hero down. For Romeo it is usually read as uncontrolled passion.
 3. B   She stabs herself with Romeo's dagger. The cup is empty, so she takes Romeo's dagger, calls her body its sheath, and stabs herself.
 Say the route each score points to: 3/3 Stretch, 2/3 Core, 0–1 Support. Pupils may choose to move up.</a:t>
@@ -7569,7 +7569,7 @@
                 <a:ea typeface="Calibri" pitchFamily="34" charset="-122"/>
                 <a:cs typeface="Calibri" pitchFamily="34" charset="-120"/>
               </a:rPr>
-              <a:t>Cowardice: he runs from every fight</a:t>
+              <a:t>Uncontrolled passion: he loves, fights and despairs too fast to think</a:t>
             </a:r>
             <a:endParaRPr lang="en-US" sz="2400" dirty="0"/>
           </a:p>
@@ -7606,7 +7606,7 @@
                 <a:ea typeface="Calibri" pitchFamily="34" charset="-122"/>
                 <a:cs typeface="Calibri" pitchFamily="34" charset="-120"/>
               </a:rPr>
-              <a:t>Uncontrolled passion: he loves, fights and despairs too fast to think</a:t>
+              <a:t>Cowardice: he runs from every fight</a:t>
             </a:r>
             <a:endParaRPr lang="en-US" sz="2400" dirty="0"/>
           </a:p>
@@ -9641,7 +9641,7 @@
                 <a:ea typeface="Cambria" pitchFamily="34" charset="-122"/>
                 <a:cs typeface="Cambria" pitchFamily="34" charset="-120"/>
               </a:rPr>
-              <a:t>B   Uncontrolled passion: he loves, fights and despairs too fast to think</a:t>
+              <a:t>A   Uncontrolled passion: he loves, fights and despairs too fast to think</a:t>
             </a:r>
             <a:endParaRPr lang="en-US" sz="1800" dirty="0"/>
           </a:p>
@@ -10212,7 +10212,7 @@
                 <a:ea typeface="Calibri" pitchFamily="34" charset="-122"/>
                 <a:cs typeface="Calibri" pitchFamily="34" charset="-120"/>
               </a:rPr>
-              <a:t>Friar John is shut up in a house suspected of plague</a:t>
+              <a:t>Romeo refuses to read it</a:t>
             </a:r>
             <a:endParaRPr lang="en-US" sz="2000" dirty="0"/>
           </a:p>
@@ -10249,7 +10249,7 @@
                 <a:ea typeface="Calibri" pitchFamily="34" charset="-122"/>
                 <a:cs typeface="Calibri" pitchFamily="34" charset="-120"/>
               </a:rPr>
-              <a:t>Romeo refuses to read it</a:t>
+              <a:t>Friar John is shut up in a house suspected of plague</a:t>
             </a:r>
             <a:endParaRPr lang="en-US" sz="2000" dirty="0"/>
           </a:p>
@@ -10688,7 +10688,7 @@
                 <a:ea typeface="Calibri" pitchFamily="34" charset="-122"/>
                 <a:cs typeface="Calibri" pitchFamily="34" charset="-120"/>
               </a:rPr>
-              <a:t>She drinks the rest of Romeo's poison</a:t>
+              <a:t>Paris kills her</a:t>
             </a:r>
             <a:endParaRPr lang="en-US" sz="2200" dirty="0"/>
           </a:p>
@@ -10762,7 +10762,7 @@
                 <a:ea typeface="Calibri" pitchFamily="34" charset="-122"/>
                 <a:cs typeface="Calibri" pitchFamily="34" charset="-120"/>
               </a:rPr>
-              <a:t>She drinks the Friar's potion again</a:t>
+              <a:t>She drinks the rest of Romeo's poison</a:t>
             </a:r>
             <a:endParaRPr lang="en-US" sz="2200" dirty="0"/>
           </a:p>
@@ -10799,7 +10799,7 @@
                 <a:ea typeface="Calibri" pitchFamily="34" charset="-122"/>
                 <a:cs typeface="Calibri" pitchFamily="34" charset="-120"/>
               </a:rPr>
-              <a:t>Paris kills her</a:t>
+              <a:t>She drinks the Friar's potion again</a:t>
             </a:r>
             <a:endParaRPr lang="en-US" sz="2200" dirty="0"/>
           </a:p>
@@ -11200,7 +11200,7 @@
                 <a:ea typeface="Calibri" pitchFamily="34" charset="-122"/>
                 <a:cs typeface="Calibri" pitchFamily="34" charset="-120"/>
               </a:rPr>
-              <a:t>B   Friar John is shut up in a house suspected of plague</a:t>
+              <a:t>C   Friar John is shut up in a house suspected of plague</a:t>
             </a:r>
             <a:endParaRPr lang="en-US" sz="2200" dirty="0"/>
           </a:p>

--- a/decks/englit-romeo/englit-romeo_ch6_fate-and-the-final-tragedy.pptx
+++ b/decks/englit-romeo/englit-romeo_ch6_fate-and-the-final-tragedy.pptx
@@ -125,36 +125,36 @@
   <p:extLst>
     <p:ext uri="{521415D9-36F7-43E2-AB2F-B90AF26B5E84}">
       <p14:sectionLst xmlns:p14="http://schemas.microsoft.com/office/powerpoint/2010/main">
-        <p14:section name="Opening" id="{43e34320-fce6-afd9-13f5-c4a9c0492df3}">
+        <p14:section name="Opening" id="{2a2c739b-5412-feeb-6769-0dd275d745eb}">
           <p14:sldIdLst>
             <p14:sldId id="256"/>
           </p14:sldIdLst>
         </p14:section>
-        <p14:section name="Gate" id="{54ed1c3f-65c8-093c-1b37-4515ff864477}">
+        <p14:section name="Gate" id="{c52b7c2f-3677-59e8-e404-8e18653beeea}">
           <p14:sldIdLst>
             <p14:sldId id="257"/>
             <p14:sldId id="258"/>
           </p14:sldIdLst>
         </p14:section>
-        <p14:section name="Pre-teach" id="{da5e92b5-9f1e-8eae-063c-6755007b0891}">
+        <p14:section name="Pre-teach" id="{3f6f5f96-d347-e3ad-d102-fa947634494b}">
           <p14:sldIdLst>
             <p14:sldId id="259"/>
           </p14:sldIdLst>
         </p14:section>
-        <p14:section name="Read-along" id="{f3543341-eb2b-2ec5-cf7a-3e043efe0c4c}">
+        <p14:section name="Read-along" id="{e0e49069-c895-a591-3b5d-6557de300b17}">
           <p14:sldIdLst>
             <p14:sldId id="260"/>
             <p14:sldId id="261"/>
           </p14:sldIdLst>
         </p14:section>
-        <p14:section name="Teach" id="{9b603d32-714e-9d8e-0ec3-3cd1ff89fe96}">
+        <p14:section name="Teach" id="{34b15ca4-e8e6-dce4-f142-efefb0f5f229}">
           <p14:sldIdLst>
             <p14:sldId id="262"/>
             <p14:sldId id="263"/>
             <p14:sldId id="264"/>
           </p14:sldIdLst>
         </p14:section>
-        <p14:section name="Routes" id="{dff1ecbf-f611-a23f-b0f2-d7354a15a2db}">
+        <p14:section name="Routes" id="{cc6dea43-7017-3da7-480d-82d48273e22f}">
           <p14:sldIdLst>
             <p14:sldId id="265"/>
             <p14:sldId id="266"/>
@@ -163,12 +163,12 @@
             <p14:sldId id="269"/>
           </p14:sldIdLst>
         </p14:section>
-        <p14:section name="Close" id="{c7d13174-f648-7b9e-d487-21c2627a9cfc}">
+        <p14:section name="Close" id="{109ad83b-3cfd-3a66-b057-64a591e564c4}">
           <p14:sldIdLst>
             <p14:sldId id="270"/>
           </p14:sldIdLst>
         </p14:section>
-        <p14:section name="Answers" id="{fd2feade-54c0-1918-3ef2-b298818c218d}">
+        <p14:section name="Answers" id="{f4d43d96-5086-b3ea-1a47-861aaecbb50b}">
           <p14:sldIdLst>
             <p14:sldId id="271"/>
             <p14:sldId id="272"/>
